--- a/assets/pptx/catalog-567.pptx
+++ b/assets/pptx/catalog-567.pptx
@@ -3286,7 +3286,7 @@
                 <a:ea typeface="Ebrima"/>
                 <a:cs typeface="Ebrima"/>
               </a:rPr>
-              <a:t>አንተ እኮ እጅግ ትልቅ ነህ (2x)</a:t>
+              <a:t>አንተ እኮ እጅግ ትልቅ ነህ 2x</a:t>
             </a:r>
           </a:p>
           <a:p>
@@ -3304,7 +3304,7 @@
                 <a:ea typeface="Ebrima"/>
                 <a:cs typeface="Ebrima"/>
               </a:rPr>
-              <a:t>አምላኬ እጅግ ትልቅ ነህ (2x)</a:t>
+              <a:t>አምላኬ እጅግ ትልቅ ነህ 2x</a:t>
             </a:r>
           </a:p>
         </p:txBody>
@@ -3407,7 +3407,7 @@
                 <a:ea typeface="Ebrima"/>
                 <a:cs typeface="Ebrima"/>
               </a:rPr>
-              <a:t>የዘለዓለም አምላክ ነፍሴ ታከብርሃለች (2x)</a:t>
+              <a:t>የዘለዓለም አምላክ ነፍሴ ታከብርሃለች 2x</a:t>
             </a:r>
           </a:p>
           <a:p>
@@ -3425,7 +3425,7 @@
                 <a:ea typeface="Ebrima"/>
                 <a:cs typeface="Ebrima"/>
               </a:rPr>
-              <a:t>የነገሥታት ንጉሥ ነፍሴ ታከብርሃለች (2x)</a:t>
+              <a:t>የነገሥታት ንጉሥ ነፍሴ ታከብርሃለች 2x</a:t>
             </a:r>
           </a:p>
           <a:p>
@@ -3443,7 +3443,7 @@
                 <a:ea typeface="Ebrima"/>
                 <a:cs typeface="Ebrima"/>
               </a:rPr>
-              <a:t>የዘለዓለም አምላክ ነፍሴ ታከብርሃለች (2x)</a:t>
+              <a:t>የዘለዓለም አምላክ ነፍሴ ታከብርሃለች 2x</a:t>
             </a:r>
           </a:p>
           <a:p>
@@ -3461,7 +3461,7 @@
                 <a:ea typeface="Ebrima"/>
                 <a:cs typeface="Ebrima"/>
               </a:rPr>
-              <a:t>ነፍሴ ታከብርሃለች (4x)</a:t>
+              <a:t>ነፍሴ ታከብርሃለች 4x</a:t>
             </a:r>
           </a:p>
         </p:txBody>
@@ -3528,7 +3528,7 @@
                 <a:ea typeface="Ebrima"/>
                 <a:cs typeface="Ebrima"/>
               </a:rPr>
-              <a:t>ትልቅ ነህ የእኔ አእምሮ ሊሸከመው ከሚችለው በላይ (4x)</a:t>
+              <a:t>ትልቅ ነህ የእኔ አእምሮ ሊሸከመው ከሚችለው በላይ 4x</a:t>
             </a:r>
           </a:p>
           <a:p>
@@ -3546,7 +3546,7 @@
                 <a:ea typeface="Ebrima"/>
                 <a:cs typeface="Ebrima"/>
               </a:rPr>
-              <a:t>ኦ ትልቅ ነህ አንተ ትልቅ (3x)</a:t>
+              <a:t>ኦ ትልቅ ነህ አንተ ትልቅ 3x</a:t>
             </a:r>
           </a:p>
           <a:p>
@@ -3564,7 +3564,7 @@
                 <a:ea typeface="Ebrima"/>
                 <a:cs typeface="Ebrima"/>
               </a:rPr>
-              <a:t>ኦ ትልቅ ነህ አንተ ትልቅ (3x)</a:t>
+              <a:t>ኦ ትልቅ ነህ አንተ ትልቅ 3x</a:t>
             </a:r>
           </a:p>
           <a:p>
@@ -3582,7 +3582,7 @@
                 <a:ea typeface="Ebrima"/>
                 <a:cs typeface="Ebrima"/>
               </a:rPr>
-              <a:t>እግዚአብሔር ትልቅ ነው አምላኬ ትልቅ ነው (2x)</a:t>
+              <a:t>እግዚአብሔር ትልቅ ነው አምላኬ ትልቅ ነው 2x</a:t>
             </a:r>
           </a:p>
         </p:txBody>
@@ -3649,7 +3649,7 @@
                 <a:ea typeface="Ebrima"/>
                 <a:cs typeface="Ebrima"/>
               </a:rPr>
-              <a:t>ትልቅነትህን ያላየ ማነው (3x)</a:t>
+              <a:t>ትልቅነትህን ያላየ ማነው 3x</a:t>
             </a:r>
           </a:p>
           <a:p>
@@ -3667,7 +3667,7 @@
                 <a:ea typeface="Ebrima"/>
                 <a:cs typeface="Ebrima"/>
               </a:rPr>
-              <a:t>ትልቅነትህን ያልሰማ ማነው (3x)</a:t>
+              <a:t>ትልቅነትህን ያልሰማ ማነው 3x</a:t>
             </a:r>
           </a:p>
           <a:p>
@@ -3842,7 +3842,7 @@
                 <a:ea typeface="Ebrima"/>
                 <a:cs typeface="Ebrima"/>
               </a:rPr>
-              <a:t>አንተ እኮ እጅግ ትልቅ ነህ (2x)</a:t>
+              <a:t>አንተ እኮ እጅግ ትልቅ ነህ 2x</a:t>
             </a:r>
           </a:p>
           <a:p>
@@ -3860,7 +3860,7 @@
                 <a:ea typeface="Ebrima"/>
                 <a:cs typeface="Ebrima"/>
               </a:rPr>
-              <a:t>አምላኬ እጅግ ትልቅ ነህ (2x)</a:t>
+              <a:t>አምላኬ እጅግ ትልቅ ነህ 2x</a:t>
             </a:r>
           </a:p>
         </p:txBody>
@@ -4120,7 +4120,7 @@
                 <a:ea typeface="Ebrima"/>
                 <a:cs typeface="Ebrima"/>
               </a:rPr>
-              <a:t>ሃ ሃ ሃሌሉያ (4x)</a:t>
+              <a:t>ሃ ሃ ሃሌሉያ 4x</a:t>
             </a:r>
           </a:p>
         </p:txBody>
@@ -4259,7 +4259,7 @@
                 <a:ea typeface="Ebrima"/>
                 <a:cs typeface="Ebrima"/>
               </a:rPr>
-              <a:t>ሃ ሃ ሃሌሉያ (4x)</a:t>
+              <a:t>ሃ ሃ ሃሌሉያ 4x</a:t>
             </a:r>
           </a:p>
         </p:txBody>
@@ -4326,7 +4326,7 @@
                 <a:ea typeface="Ebrima"/>
                 <a:cs typeface="Ebrima"/>
               </a:rPr>
-              <a:t>ትልቅ ነህ የእኔ አእምሮ ሊሸከመው ከሚችለው በላይ (4x)</a:t>
+              <a:t>ትልቅ ነህ የእኔ አእምሮ ሊሸከመው ከሚችለው በላይ 4x</a:t>
             </a:r>
           </a:p>
           <a:p>
@@ -4344,7 +4344,7 @@
                 <a:ea typeface="Ebrima"/>
                 <a:cs typeface="Ebrima"/>
               </a:rPr>
-              <a:t>ኦ ትልቅ ነህ አንተ ትልቅ (3x)</a:t>
+              <a:t>ኦ ትልቅ ነህ አንተ ትልቅ 3x</a:t>
             </a:r>
           </a:p>
           <a:p>
@@ -4362,7 +4362,7 @@
                 <a:ea typeface="Ebrima"/>
                 <a:cs typeface="Ebrima"/>
               </a:rPr>
-              <a:t>ኦ ትልቅ ነህ አንተ ትልቅ (3x)</a:t>
+              <a:t>ኦ ትልቅ ነህ አንተ ትልቅ 3x</a:t>
             </a:r>
           </a:p>
           <a:p>
@@ -4380,7 +4380,7 @@
                 <a:ea typeface="Ebrima"/>
                 <a:cs typeface="Ebrima"/>
               </a:rPr>
-              <a:t>እግዚአብሔር ትልቅ ነው አምላኬ ትልቅ ነው (2x)</a:t>
+              <a:t>እግዚአብሔር ትልቅ ነው አምላኬ ትልቅ ነው 2x</a:t>
             </a:r>
           </a:p>
         </p:txBody>
@@ -4447,7 +4447,7 @@
                 <a:ea typeface="Ebrima"/>
                 <a:cs typeface="Ebrima"/>
               </a:rPr>
-              <a:t>ትልቅነትህን ያላየ አለ ወይ? (3x)</a:t>
+              <a:t>ትልቅነትህን ያላየ አለ ወይ? 3x</a:t>
             </a:r>
           </a:p>
           <a:p>
@@ -4465,7 +4465,7 @@
                 <a:ea typeface="Ebrima"/>
                 <a:cs typeface="Ebrima"/>
               </a:rPr>
-              <a:t>ትልቅነትህን ያልሰማ አለ ወይ? (3x)</a:t>
+              <a:t>ትልቅነትህን ያልሰማ አለ ወይ? 3x</a:t>
             </a:r>
           </a:p>
           <a:p>
